--- a/tests/fixtures/deck.pptx
+++ b/tests/fixtures/deck.pptx
@@ -31,67 +31,6 @@
           <a:chExt cx="0" cy="0"/>
         </a:xfrm>
       </p:grpSpPr>
-      <p:sp>
-        <p:nvSpPr>
-          <p:cNvPr id="2" name="PlaceHolder 1"/>
-          <p:cNvSpPr>
-            <a:spLocks noGrp="1"/>
-          </p:cNvSpPr>
-          <p:nvPr>
-            <p:ph type="ftr" idx="2"/>
-          </p:nvPr>
-        </p:nvSpPr>
-        <p:spPr/>
-        <p:txBody>
-          <a:bodyPr/>
-          <a:p>
-            <a:r>
-              <a:t>Footer</a:t>
-            </a:r>
-          </a:p>
-        </p:txBody>
-      </p:sp>
-      <p:sp>
-        <p:nvSpPr>
-          <p:cNvPr id="3" name="PlaceHolder 2"/>
-          <p:cNvSpPr>
-            <a:spLocks noGrp="1"/>
-          </p:cNvSpPr>
-          <p:nvPr>
-            <p:ph type="sldNum" idx="3"/>
-          </p:nvPr>
-        </p:nvSpPr>
-        <p:spPr/>
-        <p:txBody>
-          <a:bodyPr/>
-          <a:p>
-            <a:fld id="{3812DFE2-BE84-4697-8B48-9066B0A86C1A}" type="slidenum">
-              <a:t>&lt;#&gt;</a:t>
-            </a:fld>
-          </a:p>
-        </p:txBody>
-      </p:sp>
-      <p:sp>
-        <p:nvSpPr>
-          <p:cNvPr id="4" name="PlaceHolder 3"/>
-          <p:cNvSpPr>
-            <a:spLocks noGrp="1"/>
-          </p:cNvSpPr>
-          <p:nvPr>
-            <p:ph type="dt" idx="1"/>
-          </p:nvPr>
-        </p:nvSpPr>
-        <p:spPr/>
-        <p:txBody>
-          <a:bodyPr/>
-          <a:p>
-            <a:r>
-              <a:rPr lang="en-US"/>
-              <a:t/>
-            </a:r>
-          </a:p>
-        </p:txBody>
-      </p:sp>
     </p:spTree>
   </p:cSld>
 </p:sldLayout>
@@ -116,7 +55,7 @@
       </p:grpSpPr>
       <p:sp>
         <p:nvSpPr>
-          <p:cNvPr id="5" name="PlaceHolder 1"/>
+          <p:cNvPr id="2" name="PlaceHolder 1"/>
           <p:cNvSpPr>
             <a:spLocks noGrp="1"/>
           </p:cNvSpPr>
@@ -142,21 +81,21 @@
             <a:noAutofit/>
           </a:bodyPr>
           <a:p>
-            <a:pPr indent="0" algn="ctr">
+            <a:pPr indent="0">
               <a:buNone/>
             </a:pPr>
-            <a:endParaRPr b="0" lang="en-US" sz="4400" spc="-1" strike="noStrike">
-              <a:solidFill>
-                <a:srgbClr val="000000"/>
-              </a:solidFill>
-              <a:latin typeface="Arial"/>
+            <a:endParaRPr b="0" lang="en-US" sz="4000" spc="-1" strike="noStrike">
+              <a:solidFill>
+                <a:srgbClr val="141414"/>
+              </a:solidFill>
+              <a:latin typeface="Times New Roman"/>
             </a:endParaRPr>
           </a:p>
         </p:txBody>
       </p:sp>
       <p:sp>
         <p:nvSpPr>
-          <p:cNvPr id="6" name="PlaceHolder 2"/>
+          <p:cNvPr id="3" name="PlaceHolder 2"/>
           <p:cNvSpPr>
             <a:spLocks noGrp="1"/>
           </p:cNvSpPr>
@@ -194,67 +133,6 @@
           </a:p>
         </p:txBody>
       </p:sp>
-      <p:sp>
-        <p:nvSpPr>
-          <p:cNvPr id="4" name="PlaceHolder 3"/>
-          <p:cNvSpPr>
-            <a:spLocks noGrp="1"/>
-          </p:cNvSpPr>
-          <p:nvPr>
-            <p:ph type="ftr" idx="2"/>
-          </p:nvPr>
-        </p:nvSpPr>
-        <p:spPr/>
-        <p:txBody>
-          <a:bodyPr/>
-          <a:p>
-            <a:r>
-              <a:t>Footer</a:t>
-            </a:r>
-          </a:p>
-        </p:txBody>
-      </p:sp>
-      <p:sp>
-        <p:nvSpPr>
-          <p:cNvPr id="5" name="PlaceHolder 4"/>
-          <p:cNvSpPr>
-            <a:spLocks noGrp="1"/>
-          </p:cNvSpPr>
-          <p:nvPr>
-            <p:ph type="sldNum" idx="3"/>
-          </p:nvPr>
-        </p:nvSpPr>
-        <p:spPr/>
-        <p:txBody>
-          <a:bodyPr/>
-          <a:p>
-            <a:fld id="{0172359C-88C6-4A4F-A8BA-DF952610C1A4}" type="slidenum">
-              <a:t>&lt;#&gt;</a:t>
-            </a:fld>
-          </a:p>
-        </p:txBody>
-      </p:sp>
-      <p:sp>
-        <p:nvSpPr>
-          <p:cNvPr id="6" name="PlaceHolder 5"/>
-          <p:cNvSpPr>
-            <a:spLocks noGrp="1"/>
-          </p:cNvSpPr>
-          <p:nvPr>
-            <p:ph type="dt" idx="1"/>
-          </p:nvPr>
-        </p:nvSpPr>
-        <p:spPr/>
-        <p:txBody>
-          <a:bodyPr/>
-          <a:p>
-            <a:r>
-              <a:rPr lang="en-US"/>
-              <a:t/>
-            </a:r>
-          </a:p>
-        </p:txBody>
-      </p:sp>
     </p:spTree>
   </p:cSld>
 </p:sldLayout>
@@ -263,6 +141,13 @@
 <file path=ppt/slideMasters/slideMaster1.xml><?xml version="1.0" encoding="utf-8"?>
 <p:sldMaster xmlns:a="http://schemas.openxmlformats.org/drawingml/2006/main" xmlns:p="http://schemas.openxmlformats.org/presentationml/2006/main" xmlns:r="http://schemas.openxmlformats.org/officeDocument/2006/relationships" xmlns:p14="http://schemas.microsoft.com/office/powerpoint/2010/main" xmlns:p15="http://schemas.microsoft.com/office/powerpoint/2012/main" xmlns:mc="http://schemas.openxmlformats.org/markup-compatibility/2006">
   <p:cSld>
+    <p:bg>
+      <p:bgPr>
+        <a:solidFill>
+          <a:srgbClr val="ffffff"/>
+        </a:solidFill>
+      </p:bgPr>
+    </p:bg>
     <p:spTree>
       <p:nvGrpSpPr>
         <p:cNvPr id="1" name=""/>
@@ -305,23 +190,23 @@
             <a:noAutofit/>
           </a:bodyPr>
           <a:p>
-            <a:pPr indent="0" algn="ctr">
+            <a:pPr indent="0">
               <a:buNone/>
             </a:pPr>
             <a:r>
-              <a:rPr b="0" lang="en-US" sz="4400" spc="-1" strike="noStrike">
-                <a:solidFill>
-                  <a:srgbClr val="000000"/>
-                </a:solidFill>
-                <a:latin typeface="Arial"/>
+              <a:rPr b="0" lang="en-US" sz="4000" spc="-1" strike="noStrike">
+                <a:solidFill>
+                  <a:srgbClr val="141414"/>
+                </a:solidFill>
+                <a:latin typeface="Times New Roman"/>
               </a:rPr>
               <a:t>Click to edit the title text format</a:t>
             </a:r>
-            <a:endParaRPr b="0" lang="en-US" sz="4400" spc="-1" strike="noStrike">
-              <a:solidFill>
-                <a:srgbClr val="000000"/>
-              </a:solidFill>
-              <a:latin typeface="Arial"/>
+            <a:endParaRPr b="0" lang="en-US" sz="4000" spc="-1" strike="noStrike">
+              <a:solidFill>
+                <a:srgbClr val="141414"/>
+              </a:solidFill>
+              <a:latin typeface="Times New Roman"/>
             </a:endParaRPr>
           </a:p>
         </p:txBody>
@@ -351,13 +236,10 @@
         </p:spPr>
         <p:txBody>
           <a:bodyPr lIns="0" rIns="0" tIns="0" bIns="0" anchor="t">
-            <a:normAutofit/>
+            <a:noAutofit/>
           </a:bodyPr>
           <a:p>
-            <a:pPr marL="432000" indent="-324000">
-              <a:spcBef>
-                <a:spcPts val="1417"/>
-              </a:spcBef>
+            <a:pPr marL="216000" indent="-216000">
               <a:buClr>
                 <a:srgbClr val="000000"/>
               </a:buClr>
@@ -366,51 +248,51 @@
               <a:buChar char=""/>
             </a:pPr>
             <a:r>
-              <a:rPr b="0" lang="en-US" sz="3200" spc="-1" strike="noStrike">
-                <a:solidFill>
-                  <a:srgbClr val="000000"/>
-                </a:solidFill>
-                <a:latin typeface="Arial"/>
+              <a:rPr b="0" lang="en-US" sz="2800" spc="-1" strike="noStrike">
+                <a:solidFill>
+                  <a:srgbClr val="141414"/>
+                </a:solidFill>
+                <a:latin typeface="Times New Roman"/>
               </a:rPr>
               <a:t>Click to edit the outline text format</a:t>
             </a:r>
-            <a:endParaRPr b="0" lang="en-US" sz="3200" spc="-1" strike="noStrike">
-              <a:solidFill>
-                <a:srgbClr val="000000"/>
-              </a:solidFill>
-              <a:latin typeface="Arial"/>
-            </a:endParaRPr>
-          </a:p>
-          <a:p>
-            <a:pPr lvl="1" marL="864000" indent="-324000">
+            <a:endParaRPr b="0" lang="en-US" sz="2800" spc="-1" strike="noStrike">
+              <a:solidFill>
+                <a:srgbClr val="141414"/>
+              </a:solidFill>
+              <a:latin typeface="Times New Roman"/>
+            </a:endParaRPr>
+          </a:p>
+          <a:p>
+            <a:pPr lvl="1" marL="432000" indent="-216000">
               <a:spcBef>
                 <a:spcPts val="1134"/>
               </a:spcBef>
               <a:buClr>
                 <a:srgbClr val="000000"/>
               </a:buClr>
-              <a:buSzPct val="75000"/>
-              <a:buFont typeface="Symbol" charset="2"/>
-              <a:buChar char=""/>
+              <a:buSzPct val="45000"/>
+              <a:buFont typeface="Wingdings" charset="2"/>
+              <a:buChar char=""/>
             </a:pPr>
             <a:r>
               <a:rPr b="0" lang="en-US" sz="2800" spc="-1" strike="noStrike">
                 <a:solidFill>
-                  <a:srgbClr val="000000"/>
-                </a:solidFill>
-                <a:latin typeface="Arial"/>
+                  <a:srgbClr val="141414"/>
+                </a:solidFill>
+                <a:latin typeface="Times New Roman"/>
               </a:rPr>
               <a:t>Second Outline Level</a:t>
             </a:r>
             <a:endParaRPr b="0" lang="en-US" sz="2800" spc="-1" strike="noStrike">
               <a:solidFill>
-                <a:srgbClr val="000000"/>
-              </a:solidFill>
-              <a:latin typeface="Arial"/>
-            </a:endParaRPr>
-          </a:p>
-          <a:p>
-            <a:pPr lvl="2" marL="1296000" indent="-288000">
+                <a:srgbClr val="141414"/>
+              </a:solidFill>
+              <a:latin typeface="Times New Roman"/>
+            </a:endParaRPr>
+          </a:p>
+          <a:p>
+            <a:pPr lvl="2" marL="648000" indent="-216000">
               <a:spcBef>
                 <a:spcPts val="850"/>
               </a:spcBef>
@@ -424,49 +306,49 @@
             <a:r>
               <a:rPr b="0" lang="en-US" sz="2400" spc="-1" strike="noStrike">
                 <a:solidFill>
-                  <a:srgbClr val="000000"/>
-                </a:solidFill>
-                <a:latin typeface="Arial"/>
+                  <a:srgbClr val="141414"/>
+                </a:solidFill>
+                <a:latin typeface="Times New Roman"/>
               </a:rPr>
               <a:t>Third Outline Level</a:t>
             </a:r>
             <a:endParaRPr b="0" lang="en-US" sz="2400" spc="-1" strike="noStrike">
               <a:solidFill>
-                <a:srgbClr val="000000"/>
-              </a:solidFill>
-              <a:latin typeface="Arial"/>
-            </a:endParaRPr>
-          </a:p>
-          <a:p>
-            <a:pPr lvl="3" marL="1728000" indent="-216000">
+                <a:srgbClr val="141414"/>
+              </a:solidFill>
+              <a:latin typeface="Times New Roman"/>
+            </a:endParaRPr>
+          </a:p>
+          <a:p>
+            <a:pPr lvl="3" marL="864000" indent="-216000">
               <a:spcBef>
                 <a:spcPts val="567"/>
               </a:spcBef>
               <a:buClr>
                 <a:srgbClr val="000000"/>
               </a:buClr>
-              <a:buSzPct val="75000"/>
-              <a:buFont typeface="Symbol" charset="2"/>
-              <a:buChar char=""/>
+              <a:buSzPct val="45000"/>
+              <a:buFont typeface="Wingdings" charset="2"/>
+              <a:buChar char=""/>
             </a:pPr>
             <a:r>
               <a:rPr b="0" lang="en-US" sz="2000" spc="-1" strike="noStrike">
                 <a:solidFill>
-                  <a:srgbClr val="000000"/>
-                </a:solidFill>
-                <a:latin typeface="Arial"/>
+                  <a:srgbClr val="141414"/>
+                </a:solidFill>
+                <a:latin typeface="Times New Roman"/>
               </a:rPr>
               <a:t>Fourth Outline Level</a:t>
             </a:r>
             <a:endParaRPr b="0" lang="en-US" sz="2000" spc="-1" strike="noStrike">
               <a:solidFill>
-                <a:srgbClr val="000000"/>
-              </a:solidFill>
-              <a:latin typeface="Arial"/>
-            </a:endParaRPr>
-          </a:p>
-          <a:p>
-            <a:pPr lvl="4" marL="2160000" indent="-216000">
+                <a:srgbClr val="141414"/>
+              </a:solidFill>
+              <a:latin typeface="Times New Roman"/>
+            </a:endParaRPr>
+          </a:p>
+          <a:p>
+            <a:pPr lvl="4" marL="1080000" indent="-216000">
               <a:spcBef>
                 <a:spcPts val="283"/>
               </a:spcBef>
@@ -480,21 +362,21 @@
             <a:r>
               <a:rPr b="0" lang="en-US" sz="2000" spc="-1" strike="noStrike">
                 <a:solidFill>
-                  <a:srgbClr val="000000"/>
-                </a:solidFill>
-                <a:latin typeface="Arial"/>
+                  <a:srgbClr val="141414"/>
+                </a:solidFill>
+                <a:latin typeface="Times New Roman"/>
               </a:rPr>
               <a:t>Fifth Outline Level</a:t>
             </a:r>
             <a:endParaRPr b="0" lang="en-US" sz="2000" spc="-1" strike="noStrike">
               <a:solidFill>
-                <a:srgbClr val="000000"/>
-              </a:solidFill>
-              <a:latin typeface="Arial"/>
-            </a:endParaRPr>
-          </a:p>
-          <a:p>
-            <a:pPr lvl="5" marL="2592000" indent="-216000">
+                <a:srgbClr val="141414"/>
+              </a:solidFill>
+              <a:latin typeface="Times New Roman"/>
+            </a:endParaRPr>
+          </a:p>
+          <a:p>
+            <a:pPr lvl="5" marL="1296000" indent="-216000">
               <a:spcBef>
                 <a:spcPts val="283"/>
               </a:spcBef>
@@ -508,21 +390,21 @@
             <a:r>
               <a:rPr b="0" lang="en-US" sz="2000" spc="-1" strike="noStrike">
                 <a:solidFill>
-                  <a:srgbClr val="000000"/>
-                </a:solidFill>
-                <a:latin typeface="Arial"/>
+                  <a:srgbClr val="141414"/>
+                </a:solidFill>
+                <a:latin typeface="Times New Roman"/>
               </a:rPr>
               <a:t>Sixth Outline Level</a:t>
             </a:r>
             <a:endParaRPr b="0" lang="en-US" sz="2000" spc="-1" strike="noStrike">
               <a:solidFill>
-                <a:srgbClr val="000000"/>
-              </a:solidFill>
-              <a:latin typeface="Arial"/>
-            </a:endParaRPr>
-          </a:p>
-          <a:p>
-            <a:pPr lvl="6" marL="3024000" indent="-216000">
+                <a:srgbClr val="141414"/>
+              </a:solidFill>
+              <a:latin typeface="Times New Roman"/>
+            </a:endParaRPr>
+          </a:p>
+          <a:p>
+            <a:pPr lvl="6" marL="1512000" indent="-216000">
               <a:spcBef>
                 <a:spcPts val="283"/>
               </a:spcBef>
@@ -536,195 +418,15 @@
             <a:r>
               <a:rPr b="0" lang="en-US" sz="2000" spc="-1" strike="noStrike">
                 <a:solidFill>
-                  <a:srgbClr val="000000"/>
-                </a:solidFill>
-                <a:latin typeface="Arial"/>
+                  <a:srgbClr val="141414"/>
+                </a:solidFill>
+                <a:latin typeface="Times New Roman"/>
               </a:rPr>
               <a:t>Seventh Outline Level</a:t>
             </a:r>
             <a:endParaRPr b="0" lang="en-US" sz="2000" spc="-1" strike="noStrike">
               <a:solidFill>
-                <a:srgbClr val="000000"/>
-              </a:solidFill>
-              <a:latin typeface="Arial"/>
-            </a:endParaRPr>
-          </a:p>
-        </p:txBody>
-      </p:sp>
-      <p:sp>
-        <p:nvSpPr>
-          <p:cNvPr id="2" name="PlaceHolder 3"/>
-          <p:cNvSpPr>
-            <a:spLocks noGrp="1"/>
-          </p:cNvSpPr>
-          <p:nvPr>
-            <p:ph type="dt" idx="1"/>
-          </p:nvPr>
-        </p:nvSpPr>
-        <p:spPr>
-          <a:xfrm>
-            <a:off x="504000" y="5165280"/>
-            <a:ext cx="2348280" cy="390600"/>
-          </a:xfrm>
-          <a:prstGeom prst="rect">
-            <a:avLst/>
-          </a:prstGeom>
-          <a:noFill/>
-          <a:ln w="0">
-            <a:noFill/>
-          </a:ln>
-        </p:spPr>
-        <p:txBody>
-          <a:bodyPr lIns="0" rIns="0" tIns="0" bIns="0" anchor="t">
-            <a:noAutofit/>
-          </a:bodyPr>
-          <a:lstStyle>
-            <a:lvl1pPr indent="0">
-              <a:buNone/>
-              <a:defRPr b="0" lang="en-US" sz="1400" spc="-1" strike="noStrike">
-                <a:solidFill>
-                  <a:srgbClr val="000000"/>
-                </a:solidFill>
-                <a:latin typeface="Times New Roman"/>
-              </a:defRPr>
-            </a:lvl1pPr>
-          </a:lstStyle>
-          <a:p>
-            <a:pPr indent="0">
-              <a:buNone/>
-            </a:pPr>
-            <a:r>
-              <a:rPr b="0" lang="en-US" sz="1400" spc="-1" strike="noStrike">
-                <a:solidFill>
-                  <a:srgbClr val="000000"/>
-                </a:solidFill>
-                <a:latin typeface="Times New Roman"/>
-              </a:rPr>
-              <a:t>&lt;date/time&gt;</a:t>
-            </a:r>
-            <a:endParaRPr b="0" lang="en-US" sz="1400" spc="-1" strike="noStrike">
-              <a:solidFill>
-                <a:srgbClr val="000000"/>
-              </a:solidFill>
-              <a:latin typeface="Times New Roman"/>
-            </a:endParaRPr>
-          </a:p>
-        </p:txBody>
-      </p:sp>
-      <p:sp>
-        <p:nvSpPr>
-          <p:cNvPr id="3" name="PlaceHolder 4"/>
-          <p:cNvSpPr>
-            <a:spLocks noGrp="1"/>
-          </p:cNvSpPr>
-          <p:nvPr>
-            <p:ph type="ftr" idx="2"/>
-          </p:nvPr>
-        </p:nvSpPr>
-        <p:spPr>
-          <a:xfrm>
-            <a:off x="3447360" y="5165280"/>
-            <a:ext cx="3195000" cy="390600"/>
-          </a:xfrm>
-          <a:prstGeom prst="rect">
-            <a:avLst/>
-          </a:prstGeom>
-          <a:noFill/>
-          <a:ln w="0">
-            <a:noFill/>
-          </a:ln>
-        </p:spPr>
-        <p:txBody>
-          <a:bodyPr lIns="0" rIns="0" tIns="0" bIns="0" anchor="t">
-            <a:noAutofit/>
-          </a:bodyPr>
-          <a:lstStyle>
-            <a:lvl1pPr indent="0" algn="ctr">
-              <a:buNone/>
-              <a:defRPr b="0" lang="en-US" sz="1400" spc="-1" strike="noStrike">
-                <a:solidFill>
-                  <a:srgbClr val="000000"/>
-                </a:solidFill>
-                <a:latin typeface="Times New Roman"/>
-              </a:defRPr>
-            </a:lvl1pPr>
-          </a:lstStyle>
-          <a:p>
-            <a:pPr indent="0" algn="ctr">
-              <a:buNone/>
-            </a:pPr>
-            <a:r>
-              <a:rPr b="0" lang="en-US" sz="1400" spc="-1" strike="noStrike">
-                <a:solidFill>
-                  <a:srgbClr val="000000"/>
-                </a:solidFill>
-                <a:latin typeface="Times New Roman"/>
-              </a:rPr>
-              <a:t>&lt;footer&gt;</a:t>
-            </a:r>
-            <a:endParaRPr b="0" lang="en-US" sz="1400" spc="-1" strike="noStrike">
-              <a:solidFill>
-                <a:srgbClr val="000000"/>
-              </a:solidFill>
-              <a:latin typeface="Times New Roman"/>
-            </a:endParaRPr>
-          </a:p>
-        </p:txBody>
-      </p:sp>
-      <p:sp>
-        <p:nvSpPr>
-          <p:cNvPr id="4" name="PlaceHolder 5"/>
-          <p:cNvSpPr>
-            <a:spLocks noGrp="1"/>
-          </p:cNvSpPr>
-          <p:nvPr>
-            <p:ph type="sldNum" idx="3"/>
-          </p:nvPr>
-        </p:nvSpPr>
-        <p:spPr>
-          <a:xfrm>
-            <a:off x="7227360" y="5165280"/>
-            <a:ext cx="2348280" cy="390600"/>
-          </a:xfrm>
-          <a:prstGeom prst="rect">
-            <a:avLst/>
-          </a:prstGeom>
-          <a:noFill/>
-          <a:ln w="0">
-            <a:noFill/>
-          </a:ln>
-        </p:spPr>
-        <p:txBody>
-          <a:bodyPr lIns="0" rIns="0" tIns="0" bIns="0" anchor="t">
-            <a:noAutofit/>
-          </a:bodyPr>
-          <a:lstStyle>
-            <a:lvl1pPr indent="0" algn="r">
-              <a:buNone/>
-              <a:defRPr b="0" lang="en-US" sz="1400" spc="-1" strike="noStrike">
-                <a:solidFill>
-                  <a:srgbClr val="000000"/>
-                </a:solidFill>
-                <a:latin typeface="Times New Roman"/>
-              </a:defRPr>
-            </a:lvl1pPr>
-          </a:lstStyle>
-          <a:p>
-            <a:pPr indent="0" algn="r">
-              <a:buNone/>
-            </a:pPr>
-            <a:fld id="{0414DCA8-AB1A-43AE-9503-1D882D6DAA80}" type="slidenum">
-              <a:rPr b="0" lang="en-US" sz="1400" spc="-1" strike="noStrike">
-                <a:solidFill>
-                  <a:srgbClr val="000000"/>
-                </a:solidFill>
-                <a:latin typeface="Times New Roman"/>
-              </a:rPr>
-              <a:t>&lt;number&gt;</a:t>
-            </a:fld>
-            <a:endParaRPr b="0" lang="en-US" sz="1400" spc="-1" strike="noStrike">
-              <a:solidFill>
-                <a:srgbClr val="000000"/>
+                <a:srgbClr val="141414"/>
               </a:solidFill>
               <a:latin typeface="Times New Roman"/>
             </a:endParaRPr>
@@ -744,6 +446,13 @@
 <file path=ppt/slides/slide1.xml><?xml version="1.0" encoding="utf-8"?>
 <p:sld xmlns:a="http://schemas.openxmlformats.org/drawingml/2006/main" xmlns:p="http://schemas.openxmlformats.org/presentationml/2006/main" xmlns:r="http://schemas.openxmlformats.org/officeDocument/2006/relationships" xmlns:p14="http://schemas.microsoft.com/office/powerpoint/2010/main" xmlns:p15="http://schemas.microsoft.com/office/powerpoint/2012/main" xmlns:mc="http://schemas.openxmlformats.org/markup-compatibility/2006">
   <p:cSld>
+    <p:bg>
+      <p:bgPr>
+        <a:solidFill>
+          <a:srgbClr val="ffffff"/>
+        </a:solidFill>
+      </p:bgPr>
+    </p:bg>
     <p:spTree>
       <p:nvGrpSpPr>
         <p:cNvPr id="1" name=""/>
@@ -760,9 +469,13 @@
       </p:grpSpPr>
       <p:sp>
         <p:nvSpPr>
-          <p:cNvPr id="7" name=""/>
-          <p:cNvSpPr txBox="1"/>
-          <p:nvPr/>
+          <p:cNvPr id="4" name="PlaceHolder 1"/>
+          <p:cNvSpPr>
+            <a:spLocks noGrp="1"/>
+          </p:cNvSpPr>
+          <p:nvPr>
+            <p:ph type="title"/>
+          </p:nvPr>
         </p:nvSpPr>
         <p:spPr>
           <a:xfrm>
@@ -772,34 +485,33 @@
           <a:prstGeom prst="rect">
             <a:avLst/>
           </a:prstGeom>
-          <a:solidFill>
-            <a:srgbClr val="729fcf"/>
-          </a:solidFill>
+          <a:noFill/>
           <a:ln w="0">
-            <a:solidFill>
-              <a:srgbClr val="3465a4"/>
-            </a:solidFill>
+            <a:noFill/>
           </a:ln>
         </p:spPr>
         <p:txBody>
-          <a:bodyPr lIns="90000" rIns="90000" tIns="45000" bIns="45000" anchor="t">
+          <a:bodyPr lIns="0" rIns="0" tIns="0" bIns="0" anchor="ctr">
             <a:noAutofit/>
           </a:bodyPr>
           <a:p>
-            <a:r>
-              <a:rPr b="0" lang="en-US" sz="1800" spc="-1" strike="noStrike">
-                <a:solidFill>
-                  <a:srgbClr val="000000"/>
-                </a:solidFill>
-                <a:latin typeface="Arial"/>
+            <a:pPr indent="0">
+              <a:buNone/>
+            </a:pPr>
+            <a:r>
+              <a:rPr b="0" lang="en-US" sz="4000" spc="-1" strike="noStrike">
+                <a:solidFill>
+                  <a:srgbClr val="141414"/>
+                </a:solidFill>
+                <a:latin typeface="Times New Roman"/>
               </a:rPr>
               <a:t>Club fundraiser</a:t>
             </a:r>
-            <a:endParaRPr b="0" lang="en-US" sz="1800" spc="-1" strike="noStrike">
-              <a:solidFill>
-                <a:srgbClr val="000000"/>
-              </a:solidFill>
-              <a:latin typeface="Arial"/>
+            <a:endParaRPr b="0" lang="en-US" sz="4000" spc="-1" strike="noStrike">
+              <a:solidFill>
+                <a:srgbClr val="141414"/>
+              </a:solidFill>
+              <a:latin typeface="Times New Roman"/>
             </a:endParaRPr>
           </a:p>
         </p:txBody>
@@ -820,6 +532,13 @@
 <file path=ppt/slides/slide2.xml><?xml version="1.0" encoding="utf-8"?>
 <p:sld xmlns:a="http://schemas.openxmlformats.org/drawingml/2006/main" xmlns:p="http://schemas.openxmlformats.org/presentationml/2006/main" xmlns:r="http://schemas.openxmlformats.org/officeDocument/2006/relationships" xmlns:p14="http://schemas.microsoft.com/office/powerpoint/2010/main" xmlns:p15="http://schemas.microsoft.com/office/powerpoint/2012/main" xmlns:mc="http://schemas.openxmlformats.org/markup-compatibility/2006">
   <p:cSld>
+    <p:bg>
+      <p:bgPr>
+        <a:solidFill>
+          <a:srgbClr val="ffffff"/>
+        </a:solidFill>
+      </p:bgPr>
+    </p:bg>
     <p:spTree>
       <p:nvGrpSpPr>
         <p:cNvPr id="1" name=""/>
@@ -836,9 +555,13 @@
       </p:grpSpPr>
       <p:sp>
         <p:nvSpPr>
-          <p:cNvPr id="8" name=""/>
-          <p:cNvSpPr txBox="1"/>
-          <p:nvPr/>
+          <p:cNvPr id="5" name="PlaceHolder 1"/>
+          <p:cNvSpPr>
+            <a:spLocks noGrp="1"/>
+          </p:cNvSpPr>
+          <p:nvPr>
+            <p:ph type="title"/>
+          </p:nvPr>
         </p:nvSpPr>
         <p:spPr>
           <a:xfrm>
@@ -848,34 +571,112 @@
           <a:prstGeom prst="rect">
             <a:avLst/>
           </a:prstGeom>
-          <a:solidFill>
-            <a:srgbClr val="729fcf"/>
-          </a:solidFill>
+          <a:noFill/>
           <a:ln w="0">
-            <a:solidFill>
-              <a:srgbClr val="3465a4"/>
-            </a:solidFill>
+            <a:noFill/>
           </a:ln>
         </p:spPr>
         <p:txBody>
-          <a:bodyPr lIns="90000" rIns="90000" tIns="45000" bIns="45000" anchor="t">
+          <a:bodyPr lIns="0" rIns="0" tIns="0" bIns="0" anchor="ctr">
             <a:noAutofit/>
           </a:bodyPr>
           <a:p>
-            <a:r>
-              <a:rPr b="0" lang="en-US" sz="1800" spc="-1" strike="noStrike">
-                <a:solidFill>
-                  <a:srgbClr val="000000"/>
-                </a:solidFill>
-                <a:latin typeface="Arial"/>
+            <a:pPr indent="0">
+              <a:buNone/>
+            </a:pPr>
+            <a:r>
+              <a:rPr b="0" lang="en-US" sz="4000" spc="-1" strike="noStrike">
+                <a:solidFill>
+                  <a:srgbClr val="141414"/>
+                </a:solidFill>
+                <a:latin typeface="Times New Roman"/>
               </a:rPr>
               <a:t>The plan</a:t>
             </a:r>
-            <a:endParaRPr b="0" lang="en-US" sz="1800" spc="-1" strike="noStrike">
-              <a:solidFill>
-                <a:srgbClr val="000000"/>
-              </a:solidFill>
-              <a:latin typeface="Arial"/>
+            <a:endParaRPr b="0" lang="en-US" sz="4000" spc="-1" strike="noStrike">
+              <a:solidFill>
+                <a:srgbClr val="141414"/>
+              </a:solidFill>
+              <a:latin typeface="Times New Roman"/>
+            </a:endParaRPr>
+          </a:p>
+        </p:txBody>
+      </p:sp>
+      <p:sp>
+        <p:nvSpPr>
+          <p:cNvPr id="6" name="PlaceHolder 2"/>
+          <p:cNvSpPr>
+            <a:spLocks noGrp="1"/>
+          </p:cNvSpPr>
+          <p:nvPr>
+            <p:ph/>
+          </p:nvPr>
+        </p:nvSpPr>
+        <p:spPr>
+          <a:xfrm>
+            <a:off x="720000" y="1980000"/>
+            <a:ext cx="8640000" cy="2880000"/>
+          </a:xfrm>
+          <a:prstGeom prst="rect">
+            <a:avLst/>
+          </a:prstGeom>
+          <a:noFill/>
+          <a:ln w="0">
+            <a:noFill/>
+          </a:ln>
+        </p:spPr>
+        <p:txBody>
+          <a:bodyPr lIns="0" rIns="0" tIns="0" bIns="0" anchor="t">
+            <a:noAutofit/>
+          </a:bodyPr>
+          <a:p>
+            <a:pPr marL="216000" indent="-216000">
+              <a:buClr>
+                <a:srgbClr val="000000"/>
+              </a:buClr>
+              <a:buSzPct val="45000"/>
+              <a:buFont typeface="starbats" charset="2"/>
+              <a:buChar char=""/>
+            </a:pPr>
+            <a:r>
+              <a:rPr b="0" lang="en-US" sz="2800" spc="-1" strike="noStrike">
+                <a:solidFill>
+                  <a:srgbClr val="141414"/>
+                </a:solidFill>
+                <a:latin typeface="Times New Roman"/>
+              </a:rPr>
+              <a:t>Bake sale on Saturday</a:t>
+            </a:r>
+            <a:endParaRPr b="0" lang="en-US" sz="2800" spc="-1" strike="noStrike">
+              <a:solidFill>
+                <a:srgbClr val="141414"/>
+              </a:solidFill>
+              <a:latin typeface="Times New Roman"/>
+            </a:endParaRPr>
+          </a:p>
+          <a:p>
+            <a:pPr marL="216000" indent="-216000">
+              <a:buClr>
+                <a:srgbClr val="000000"/>
+              </a:buClr>
+              <a:buSzPct val="45000"/>
+              <a:buFont typeface="starbats" charset="2"/>
+              <a:buChar char=""/>
+            </a:pPr>
+            <a:r>
+              <a:rPr b="0" lang="en-US" sz="2800" spc="-1" strike="noStrike">
+                <a:solidFill>
+                  <a:srgbClr val="141414"/>
+                </a:solidFill>
+                <a:latin typeface="Times New Roman"/>
+              </a:rPr>
+              <a:t>Raffle at the game</a:t>
+            </a:r>
+            <a:endParaRPr b="0" lang="en-US" sz="2800" spc="-1" strike="noStrike">
+              <a:solidFill>
+                <a:srgbClr val="141414"/>
+              </a:solidFill>
+              <a:latin typeface="Times New Roman"/>
             </a:endParaRPr>
           </a:p>
         </p:txBody>
@@ -896,6 +697,13 @@
 <file path=ppt/slides/slide3.xml><?xml version="1.0" encoding="utf-8"?>
 <p:sld xmlns:a="http://schemas.openxmlformats.org/drawingml/2006/main" xmlns:p="http://schemas.openxmlformats.org/presentationml/2006/main" xmlns:r="http://schemas.openxmlformats.org/officeDocument/2006/relationships" xmlns:p14="http://schemas.microsoft.com/office/powerpoint/2010/main" xmlns:p15="http://schemas.microsoft.com/office/powerpoint/2012/main" xmlns:mc="http://schemas.openxmlformats.org/markup-compatibility/2006">
   <p:cSld>
+    <p:bg>
+      <p:bgPr>
+        <a:solidFill>
+          <a:srgbClr val="ffffff"/>
+        </a:solidFill>
+      </p:bgPr>
+    </p:bg>
     <p:spTree>
       <p:nvGrpSpPr>
         <p:cNvPr id="1" name=""/>
@@ -912,9 +720,13 @@
       </p:grpSpPr>
       <p:sp>
         <p:nvSpPr>
-          <p:cNvPr id="9" name=""/>
-          <p:cNvSpPr txBox="1"/>
-          <p:nvPr/>
+          <p:cNvPr id="7" name="PlaceHolder 1"/>
+          <p:cNvSpPr>
+            <a:spLocks noGrp="1"/>
+          </p:cNvSpPr>
+          <p:nvPr>
+            <p:ph type="title"/>
+          </p:nvPr>
         </p:nvSpPr>
         <p:spPr>
           <a:xfrm>
@@ -924,34 +736,33 @@
           <a:prstGeom prst="rect">
             <a:avLst/>
           </a:prstGeom>
-          <a:solidFill>
-            <a:srgbClr val="729fcf"/>
-          </a:solidFill>
+          <a:noFill/>
           <a:ln w="0">
-            <a:solidFill>
-              <a:srgbClr val="3465a4"/>
-            </a:solidFill>
+            <a:noFill/>
           </a:ln>
         </p:spPr>
         <p:txBody>
-          <a:bodyPr lIns="90000" rIns="90000" tIns="45000" bIns="45000" anchor="t">
+          <a:bodyPr lIns="0" rIns="0" tIns="0" bIns="0" anchor="ctr">
             <a:noAutofit/>
           </a:bodyPr>
           <a:p>
-            <a:r>
-              <a:rPr b="0" lang="en-US" sz="1800" spc="-1" strike="noStrike">
-                <a:solidFill>
-                  <a:srgbClr val="000000"/>
-                </a:solidFill>
-                <a:latin typeface="Arial"/>
+            <a:pPr indent="0">
+              <a:buNone/>
+            </a:pPr>
+            <a:r>
+              <a:rPr b="0" lang="en-US" sz="4000" spc="-1" strike="noStrike">
+                <a:solidFill>
+                  <a:srgbClr val="141414"/>
+                </a:solidFill>
+                <a:latin typeface="Times New Roman"/>
               </a:rPr>
               <a:t>Thank you</a:t>
             </a:r>
-            <a:endParaRPr b="0" lang="en-US" sz="1800" spc="-1" strike="noStrike">
-              <a:solidFill>
-                <a:srgbClr val="000000"/>
-              </a:solidFill>
-              <a:latin typeface="Arial"/>
+            <a:endParaRPr b="0" lang="en-US" sz="4000" spc="-1" strike="noStrike">
+              <a:solidFill>
+                <a:srgbClr val="141414"/>
+              </a:solidFill>
+              <a:latin typeface="Times New Roman"/>
             </a:endParaRPr>
           </a:p>
         </p:txBody>
